--- a/prezentacie/c05w.pptx
+++ b/prezentacie/c05w.pptx
@@ -249,7 +249,7 @@
           <a:p>
             <a:fld id="{10052495-8BC8-4CFB-94B1-B0429F101A0D}" type="datetimeFigureOut">
               <a:rPr lang="sk-SK" smtClean="0"/>
-              <a:t>1. 10. 2025</a:t>
+              <a:t>17. 10. 2026</a:t>
             </a:fld>
             <a:endParaRPr lang="sk-SK"/>
           </a:p>
@@ -419,7 +419,7 @@
           <a:p>
             <a:fld id="{10052495-8BC8-4CFB-94B1-B0429F101A0D}" type="datetimeFigureOut">
               <a:rPr lang="sk-SK" smtClean="0"/>
-              <a:t>1. 10. 2025</a:t>
+              <a:t>17. 10. 2026</a:t>
             </a:fld>
             <a:endParaRPr lang="sk-SK"/>
           </a:p>
@@ -599,7 +599,7 @@
           <a:p>
             <a:fld id="{10052495-8BC8-4CFB-94B1-B0429F101A0D}" type="datetimeFigureOut">
               <a:rPr lang="sk-SK" smtClean="0"/>
-              <a:t>1. 10. 2025</a:t>
+              <a:t>17. 10. 2026</a:t>
             </a:fld>
             <a:endParaRPr lang="sk-SK"/>
           </a:p>
@@ -769,7 +769,7 @@
           <a:p>
             <a:fld id="{10052495-8BC8-4CFB-94B1-B0429F101A0D}" type="datetimeFigureOut">
               <a:rPr lang="sk-SK" smtClean="0"/>
-              <a:t>1. 10. 2025</a:t>
+              <a:t>17. 10. 2026</a:t>
             </a:fld>
             <a:endParaRPr lang="sk-SK"/>
           </a:p>
@@ -1015,7 +1015,7 @@
           <a:p>
             <a:fld id="{10052495-8BC8-4CFB-94B1-B0429F101A0D}" type="datetimeFigureOut">
               <a:rPr lang="sk-SK" smtClean="0"/>
-              <a:t>1. 10. 2025</a:t>
+              <a:t>17. 10. 2026</a:t>
             </a:fld>
             <a:endParaRPr lang="sk-SK"/>
           </a:p>
@@ -1247,7 +1247,7 @@
           <a:p>
             <a:fld id="{10052495-8BC8-4CFB-94B1-B0429F101A0D}" type="datetimeFigureOut">
               <a:rPr lang="sk-SK" smtClean="0"/>
-              <a:t>1. 10. 2025</a:t>
+              <a:t>17. 10. 2026</a:t>
             </a:fld>
             <a:endParaRPr lang="sk-SK"/>
           </a:p>
@@ -1614,7 +1614,7 @@
           <a:p>
             <a:fld id="{10052495-8BC8-4CFB-94B1-B0429F101A0D}" type="datetimeFigureOut">
               <a:rPr lang="sk-SK" smtClean="0"/>
-              <a:t>1. 10. 2025</a:t>
+              <a:t>17. 10. 2026</a:t>
             </a:fld>
             <a:endParaRPr lang="sk-SK"/>
           </a:p>
@@ -1732,7 +1732,7 @@
           <a:p>
             <a:fld id="{10052495-8BC8-4CFB-94B1-B0429F101A0D}" type="datetimeFigureOut">
               <a:rPr lang="sk-SK" smtClean="0"/>
-              <a:t>1. 10. 2025</a:t>
+              <a:t>17. 10. 2026</a:t>
             </a:fld>
             <a:endParaRPr lang="sk-SK"/>
           </a:p>
@@ -1827,7 +1827,7 @@
           <a:p>
             <a:fld id="{10052495-8BC8-4CFB-94B1-B0429F101A0D}" type="datetimeFigureOut">
               <a:rPr lang="sk-SK" smtClean="0"/>
-              <a:t>1. 10. 2025</a:t>
+              <a:t>17. 10. 2026</a:t>
             </a:fld>
             <a:endParaRPr lang="sk-SK"/>
           </a:p>
@@ -2104,7 +2104,7 @@
           <a:p>
             <a:fld id="{10052495-8BC8-4CFB-94B1-B0429F101A0D}" type="datetimeFigureOut">
               <a:rPr lang="sk-SK" smtClean="0"/>
-              <a:t>1. 10. 2025</a:t>
+              <a:t>17. 10. 2026</a:t>
             </a:fld>
             <a:endParaRPr lang="sk-SK"/>
           </a:p>
@@ -2361,7 +2361,7 @@
           <a:p>
             <a:fld id="{10052495-8BC8-4CFB-94B1-B0429F101A0D}" type="datetimeFigureOut">
               <a:rPr lang="sk-SK" smtClean="0"/>
-              <a:t>1. 10. 2025</a:t>
+              <a:t>17. 10. 2026</a:t>
             </a:fld>
             <a:endParaRPr lang="sk-SK"/>
           </a:p>
@@ -2574,7 +2574,7 @@
           <a:p>
             <a:fld id="{10052495-8BC8-4CFB-94B1-B0429F101A0D}" type="datetimeFigureOut">
               <a:rPr lang="sk-SK" smtClean="0"/>
-              <a:t>1. 10. 2025</a:t>
+              <a:t>17. 10. 2026</a:t>
             </a:fld>
             <a:endParaRPr lang="sk-SK"/>
           </a:p>
@@ -3501,7 +3501,15 @@
             </a:br>
             <a:r>
               <a:rPr lang="sk-SK" b="1" dirty="0"/>
-              <a:t>Ing. Jozef Wagner PhD.</a:t>
+              <a:t>Ing. Jozef Wagner</a:t>
+            </a:r>
+            <a:r>
+              <a:rPr lang="en-US" b="1" dirty="0"/>
+              <a:t>,</a:t>
+            </a:r>
+            <a:r>
+              <a:rPr lang="sk-SK" b="1" dirty="0"/>
+              <a:t> PhD.</a:t>
             </a:r>
           </a:p>
           <a:p>
@@ -4211,11 +4219,25 @@
               <a:buNone/>
             </a:pPr>
             <a:r>
-              <a:rPr lang="sk-SK" dirty="0" err="1"/>
+              <a:rPr lang="sk-SK" dirty="0" err="1">
+                <a:solidFill>
+                  <a:srgbClr val="FF0000"/>
+                </a:solidFill>
+                <a:highlight>
+                  <a:srgbClr val="00FFFF"/>
+                </a:highlight>
+              </a:rPr>
               <a:t>Literál</a:t>
             </a:r>
             <a:r>
-              <a:rPr lang="sk-SK" dirty="0"/>
+              <a:rPr lang="sk-SK" dirty="0">
+                <a:solidFill>
+                  <a:srgbClr val="FF0000"/>
+                </a:solidFill>
+                <a:highlight>
+                  <a:srgbClr val="00FFFF"/>
+                </a:highlight>
+              </a:rPr>
               <a:t> je zápis konkrétneho údaja priamo v kóde</a:t>
             </a:r>
           </a:p>
@@ -4979,6 +5001,9 @@
             </a:pPr>
             <a:r>
               <a:rPr lang="sk-SK" sz="2400" dirty="0" err="1">
+                <a:solidFill>
+                  <a:srgbClr val="FF0000"/>
+                </a:solidFill>
                 <a:highlight>
                   <a:srgbClr val="FFFF00"/>
                 </a:highlight>
@@ -4987,7 +5012,14 @@
               <a:t>null</a:t>
             </a:r>
             <a:r>
-              <a:rPr lang="sk-SK" dirty="0"/>
+              <a:rPr lang="sk-SK" dirty="0">
+                <a:solidFill>
+                  <a:srgbClr val="FF0000"/>
+                </a:solidFill>
+                <a:highlight>
+                  <a:srgbClr val="00FFFF"/>
+                </a:highlight>
+              </a:rPr>
               <a:t> vyjadruje neprítomnosť hodnoty</a:t>
             </a:r>
           </a:p>
@@ -5056,11 +5088,21 @@
               <a:buNone/>
             </a:pPr>
             <a:r>
-              <a:rPr lang="sk-SK" dirty="0"/>
+              <a:rPr lang="sk-SK" dirty="0">
+                <a:solidFill>
+                  <a:srgbClr val="FF0000"/>
+                </a:solidFill>
+                <a:highlight>
+                  <a:srgbClr val="00FFFF"/>
+                </a:highlight>
+              </a:rPr>
               <a:t>Výnimka </a:t>
             </a:r>
             <a:r>
               <a:rPr lang="sk-SK" sz="2400" dirty="0" err="1">
+                <a:solidFill>
+                  <a:srgbClr val="FF0000"/>
+                </a:solidFill>
                 <a:highlight>
                   <a:srgbClr val="FFFF00"/>
                 </a:highlight>
@@ -5069,11 +5111,21 @@
               <a:t>NullPointerException</a:t>
             </a:r>
             <a:r>
-              <a:rPr lang="sk-SK" dirty="0"/>
+              <a:rPr lang="sk-SK" dirty="0">
+                <a:solidFill>
+                  <a:srgbClr val="FF0000"/>
+                </a:solidFill>
+                <a:highlight>
+                  <a:srgbClr val="00FFFF"/>
+                </a:highlight>
+              </a:rPr>
               <a:t> sa vyhodí, ak program očakával objekt a nie </a:t>
             </a:r>
             <a:r>
               <a:rPr lang="sk-SK" sz="2400" dirty="0" err="1">
+                <a:solidFill>
+                  <a:srgbClr val="FF0000"/>
+                </a:solidFill>
                 <a:highlight>
                   <a:srgbClr val="FFFF00"/>
                 </a:highlight>
@@ -5082,6 +5134,9 @@
               <a:t>null</a:t>
             </a:r>
             <a:endParaRPr lang="sk-SK" sz="2400" dirty="0">
+              <a:solidFill>
+                <a:srgbClr val="FF0000"/>
+              </a:solidFill>
               <a:highlight>
                 <a:srgbClr val="FFFF00"/>
               </a:highlight>
@@ -5219,19 +5274,47 @@
               <a:buNone/>
             </a:pPr>
             <a:r>
-              <a:rPr lang="sk-SK" b="1" dirty="0"/>
+              <a:rPr lang="sk-SK" b="1" dirty="0">
+                <a:solidFill>
+                  <a:srgbClr val="FF0000"/>
+                </a:solidFill>
+                <a:highlight>
+                  <a:srgbClr val="00FFFF"/>
+                </a:highlight>
+              </a:rPr>
               <a:t>Implicitná konverzia </a:t>
             </a:r>
             <a:r>
-              <a:rPr lang="sk-SK" dirty="0"/>
+              <a:rPr lang="sk-SK" dirty="0">
+                <a:solidFill>
+                  <a:srgbClr val="FF0000"/>
+                </a:solidFill>
+                <a:highlight>
+                  <a:srgbClr val="00FFFF"/>
+                </a:highlight>
+              </a:rPr>
               <a:t>- </a:t>
             </a:r>
             <a:r>
-              <a:rPr lang="sk-SK" dirty="0" err="1"/>
+              <a:rPr lang="sk-SK" dirty="0" err="1">
+                <a:solidFill>
+                  <a:srgbClr val="FF0000"/>
+                </a:solidFill>
+                <a:highlight>
+                  <a:srgbClr val="00FFFF"/>
+                </a:highlight>
+              </a:rPr>
               <a:t>widening</a:t>
             </a:r>
             <a:r>
-              <a:rPr lang="sk-SK" dirty="0"/>
+              <a:rPr lang="sk-SK" dirty="0">
+                <a:solidFill>
+                  <a:srgbClr val="FF0000"/>
+                </a:solidFill>
+                <a:highlight>
+                  <a:srgbClr val="00FFFF"/>
+                </a:highlight>
+              </a:rPr>
               <a:t>, automaticky konvertuje menšie typy na väčšie </a:t>
             </a:r>
           </a:p>
@@ -5359,7 +5442,7 @@
               <a:buNone/>
             </a:pPr>
             <a:r>
-              <a:rPr lang="sk-SK" sz="2400" dirty="0" err="1">
+              <a:rPr lang="sk-SK" sz="2400" b="1" dirty="0" err="1">
                 <a:highlight>
                   <a:srgbClr val="FFFF00"/>
                 </a:highlight>
@@ -5368,7 +5451,7 @@
               <a:t>char</a:t>
             </a:r>
             <a:r>
-              <a:rPr lang="sk-SK" sz="2400" dirty="0">
+              <a:rPr lang="sk-SK" sz="2400" b="1" dirty="0">
                 <a:highlight>
                   <a:srgbClr val="FFFF00"/>
                 </a:highlight>
@@ -5377,7 +5460,7 @@
               <a:t> → </a:t>
             </a:r>
             <a:r>
-              <a:rPr lang="sk-SK" sz="2400" dirty="0" err="1">
+              <a:rPr lang="sk-SK" sz="2400" b="1" dirty="0" err="1">
                 <a:highlight>
                   <a:srgbClr val="FFFF00"/>
                 </a:highlight>
@@ -5385,7 +5468,7 @@
               </a:rPr>
               <a:t>int</a:t>
             </a:r>
-            <a:endParaRPr lang="sk-SK" sz="2400" dirty="0">
+            <a:endParaRPr lang="sk-SK" sz="2400" b="1" dirty="0">
               <a:highlight>
                 <a:srgbClr val="FFFF00"/>
               </a:highlight>
@@ -5414,28 +5497,74 @@
               <a:buNone/>
             </a:pPr>
             <a:r>
-              <a:rPr lang="sk-SK" b="1" dirty="0"/>
+              <a:rPr lang="sk-SK" b="1" dirty="0">
+                <a:solidFill>
+                  <a:srgbClr val="FF0000"/>
+                </a:solidFill>
+                <a:highlight>
+                  <a:srgbClr val="00FFFF"/>
+                </a:highlight>
+              </a:rPr>
               <a:t>Explicitná konverzia </a:t>
             </a:r>
             <a:r>
+              <a:rPr lang="sk-SK" dirty="0">
+                <a:solidFill>
+                  <a:srgbClr val="FF0000"/>
+                </a:solidFill>
+                <a:highlight>
+                  <a:srgbClr val="00FFFF"/>
+                </a:highlight>
+              </a:rPr>
+              <a:t>- </a:t>
+            </a:r>
+            <a:r>
+              <a:rPr lang="sk-SK" dirty="0" err="1">
+                <a:solidFill>
+                  <a:srgbClr val="FF0000"/>
+                </a:solidFill>
+                <a:highlight>
+                  <a:srgbClr val="00FFFF"/>
+                </a:highlight>
+              </a:rPr>
+              <a:t>narrowing</a:t>
+            </a:r>
+            <a:r>
+              <a:rPr lang="sk-SK" dirty="0">
+                <a:solidFill>
+                  <a:srgbClr val="FF0000"/>
+                </a:solidFill>
+                <a:highlight>
+                  <a:srgbClr val="00FFFF"/>
+                </a:highlight>
+              </a:rPr>
+              <a:t> alebo </a:t>
+            </a:r>
+            <a:r>
+              <a:rPr lang="sk-SK" dirty="0" err="1">
+                <a:solidFill>
+                  <a:srgbClr val="FF0000"/>
+                </a:solidFill>
+                <a:highlight>
+                  <a:srgbClr val="00FFFF"/>
+                </a:highlight>
+              </a:rPr>
+              <a:t>casting</a:t>
+            </a:r>
+            <a:r>
+              <a:rPr lang="sk-SK" dirty="0">
+                <a:solidFill>
+                  <a:srgbClr val="FF0000"/>
+                </a:solidFill>
+                <a:highlight>
+                  <a:srgbClr val="00FFFF"/>
+                </a:highlight>
+              </a:rPr>
+              <a:t>, manuálna konverzia.</a:t>
+            </a:r>
+            <a:r>
               <a:rPr lang="sk-SK" dirty="0"/>
-              <a:t>- </a:t>
-            </a:r>
-            <a:r>
-              <a:rPr lang="sk-SK" dirty="0" err="1"/>
-              <a:t>narrowing</a:t>
-            </a:r>
-            <a:r>
-              <a:rPr lang="sk-SK" dirty="0"/>
-              <a:t> alebo </a:t>
-            </a:r>
-            <a:r>
-              <a:rPr lang="sk-SK" dirty="0" err="1"/>
-              <a:t>casting</a:t>
-            </a:r>
-            <a:r>
-              <a:rPr lang="sk-SK" dirty="0"/>
-              <a:t>, manuálna konverzia. Môžu nastať nasledovné problémy:</a:t>
+              <a:t> Môžu nastať nasledovné problémy:</a:t>
             </a:r>
           </a:p>
           <a:p>
@@ -5493,7 +5622,14 @@
           <a:lstStyle/>
           <a:p>
             <a:r>
-              <a:rPr lang="sk-SK" dirty="0"/>
+              <a:rPr lang="sk-SK" dirty="0">
+                <a:solidFill>
+                  <a:srgbClr val="FF0000"/>
+                </a:solidFill>
+                <a:highlight>
+                  <a:srgbClr val="00FFFF"/>
+                </a:highlight>
+              </a:rPr>
               <a:t>Typová konverzia</a:t>
             </a:r>
           </a:p>
@@ -5585,10 +5721,10 @@
           </p:nvPr>
         </p:nvPicPr>
         <p:blipFill>
-          <a:blip r:embed="rId2">
+          <a:blip>
             <a:extLst>
               <a:ext uri="{96DAC541-7B7A-43D3-8B79-37D633B846F1}">
-                <asvg:svgBlip xmlns:asvg="http://schemas.microsoft.com/office/drawing/2016/SVG/main" r:embed="rId3"/>
+                <asvg:svgBlip xmlns:asvg="http://schemas.microsoft.com/office/drawing/2016/SVG/main" r:embed="rId2"/>
               </a:ext>
             </a:extLst>
           </a:blip>
@@ -5682,7 +5818,14 @@
               <a:buNone/>
             </a:pPr>
             <a:r>
-              <a:rPr lang="sk-SK" dirty="0"/>
+              <a:rPr lang="sk-SK" dirty="0">
+                <a:solidFill>
+                  <a:srgbClr val="FF0000"/>
+                </a:solidFill>
+                <a:highlight>
+                  <a:srgbClr val="00FFFF"/>
+                </a:highlight>
+              </a:rPr>
               <a:t>Pre každý primitívny dátový typ existuje príslušný obalený typ</a:t>
             </a:r>
           </a:p>
@@ -5820,24 +5963,63 @@
               <a:buNone/>
             </a:pPr>
             <a:r>
-              <a:rPr lang="sk-SK" b="1" dirty="0" err="1"/>
+              <a:rPr lang="sk-SK" b="1" dirty="0" err="1">
+                <a:solidFill>
+                  <a:srgbClr val="FF0000"/>
+                </a:solidFill>
+                <a:highlight>
+                  <a:srgbClr val="00FFFF"/>
+                </a:highlight>
+              </a:rPr>
               <a:t>Autoboxing</a:t>
             </a:r>
             <a:r>
+              <a:rPr lang="sk-SK" dirty="0">
+                <a:solidFill>
+                  <a:srgbClr val="FF0000"/>
+                </a:solidFill>
+                <a:highlight>
+                  <a:srgbClr val="00FFFF"/>
+                </a:highlight>
+              </a:rPr>
+              <a:t> a </a:t>
+            </a:r>
+            <a:r>
+              <a:rPr lang="sk-SK" b="1" dirty="0">
+                <a:solidFill>
+                  <a:srgbClr val="FF0000"/>
+                </a:solidFill>
+                <a:highlight>
+                  <a:srgbClr val="00FFFF"/>
+                </a:highlight>
+              </a:rPr>
+              <a:t>auto-</a:t>
+            </a:r>
+            <a:r>
+              <a:rPr lang="sk-SK" b="1" dirty="0" err="1">
+                <a:solidFill>
+                  <a:srgbClr val="FF0000"/>
+                </a:solidFill>
+                <a:highlight>
+                  <a:srgbClr val="00FFFF"/>
+                </a:highlight>
+              </a:rPr>
+              <a:t>unboxing</a:t>
+            </a:r>
+            <a:r>
+              <a:rPr lang="sk-SK" dirty="0">
+                <a:solidFill>
+                  <a:srgbClr val="FF0000"/>
+                </a:solidFill>
+                <a:highlight>
+                  <a:srgbClr val="00FFFF"/>
+                </a:highlight>
+              </a:rPr>
+              <a:t> je automatická konverzia z a do balených typov</a:t>
+            </a:r>
+            <a:r>
               <a:rPr lang="sk-SK" dirty="0"/>
-              <a:t> a </a:t>
-            </a:r>
-            <a:r>
-              <a:rPr lang="sk-SK" b="1" dirty="0"/>
-              <a:t>auto-</a:t>
-            </a:r>
-            <a:r>
-              <a:rPr lang="sk-SK" b="1" dirty="0" err="1"/>
-              <a:t>unboxing</a:t>
-            </a:r>
-            <a:r>
-              <a:rPr lang="sk-SK" dirty="0"/>
-              <a:t> je automatická konverzia z a do balených typov, keď je to potrebné</a:t>
+              <a:t>, keď je to potrebné</a:t>
             </a:r>
           </a:p>
           <a:p>
@@ -5857,11 +6039,21 @@
               <a:buNone/>
             </a:pPr>
             <a:r>
-              <a:rPr lang="sk-SK" dirty="0"/>
+              <a:rPr lang="sk-SK" dirty="0">
+                <a:solidFill>
+                  <a:srgbClr val="FF0000"/>
+                </a:solidFill>
+                <a:highlight>
+                  <a:srgbClr val="00FFFF"/>
+                </a:highlight>
+              </a:rPr>
               <a:t>Uprednostňujeme primitívne typy pred obalenými, Java robí konverzie za nás. 2 obalené objekty porovnávam cez </a:t>
             </a:r>
             <a:r>
               <a:rPr lang="sk-SK" dirty="0" err="1">
+                <a:solidFill>
+                  <a:srgbClr val="FF0000"/>
+                </a:solidFill>
                 <a:highlight>
                   <a:srgbClr val="FFFF00"/>
                 </a:highlight>
@@ -5871,6 +6063,9 @@
             </a:r>
             <a:r>
               <a:rPr lang="sk-SK" dirty="0">
+                <a:solidFill>
+                  <a:srgbClr val="FF0000"/>
+                </a:solidFill>
                 <a:highlight>
                   <a:srgbClr val="FFFF00"/>
                 </a:highlight>
@@ -5924,22 +6119,57 @@
           <a:lstStyle/>
           <a:p>
             <a:r>
-              <a:rPr lang="sk-SK" dirty="0"/>
+              <a:rPr lang="sk-SK" dirty="0">
+                <a:solidFill>
+                  <a:srgbClr val="FF0000"/>
+                </a:solidFill>
+                <a:highlight>
+                  <a:srgbClr val="00FFFF"/>
+                </a:highlight>
+              </a:rPr>
               <a:t>Obalené typy - </a:t>
             </a:r>
             <a:r>
-              <a:rPr lang="sk-SK" dirty="0" err="1"/>
+              <a:rPr lang="sk-SK" dirty="0" err="1">
+                <a:solidFill>
+                  <a:srgbClr val="FF0000"/>
+                </a:solidFill>
+                <a:highlight>
+                  <a:srgbClr val="00FFFF"/>
+                </a:highlight>
+              </a:rPr>
               <a:t>wrapper</a:t>
             </a:r>
             <a:r>
-              <a:rPr lang="sk-SK" dirty="0"/>
+              <a:rPr lang="sk-SK" dirty="0">
+                <a:solidFill>
+                  <a:srgbClr val="FF0000"/>
+                </a:solidFill>
+                <a:highlight>
+                  <a:srgbClr val="00FFFF"/>
+                </a:highlight>
+              </a:rPr>
               <a:t> </a:t>
             </a:r>
             <a:r>
-              <a:rPr lang="sk-SK" dirty="0" err="1"/>
+              <a:rPr lang="sk-SK" dirty="0" err="1">
+                <a:solidFill>
+                  <a:srgbClr val="FF0000"/>
+                </a:solidFill>
+                <a:highlight>
+                  <a:srgbClr val="00FFFF"/>
+                </a:highlight>
+              </a:rPr>
               <a:t>classes</a:t>
             </a:r>
-            <a:endParaRPr lang="sk-SK" dirty="0"/>
+            <a:endParaRPr lang="sk-SK" dirty="0">
+              <a:solidFill>
+                <a:srgbClr val="FF0000"/>
+              </a:solidFill>
+              <a:highlight>
+                <a:srgbClr val="00FFFF"/>
+              </a:highlight>
+            </a:endParaRPr>
           </a:p>
         </p:txBody>
       </p:sp>
